--- a/HoI4/TFR_ext/v0.1/TFR_alus/_Assets/FlagBase_82_52.pptx
+++ b/HoI4/TFR_ext/v0.1/TFR_alus/_Assets/FlagBase_82_52.pptx
@@ -5,11 +5,12 @@
     <p:sldMasterId id="2147483660" r:id="rId1"/>
   </p:sldMasterIdLst>
   <p:notesMasterIdLst>
-    <p:notesMasterId r:id="rId4"/>
+    <p:notesMasterId r:id="rId5"/>
   </p:notesMasterIdLst>
   <p:sldIdLst>
     <p:sldId id="256" r:id="rId2"/>
     <p:sldId id="257" r:id="rId3"/>
+    <p:sldId id="258" r:id="rId4"/>
   </p:sldIdLst>
   <p:sldSz cx="10814050" cy="6858000"/>
   <p:notesSz cx="6858000" cy="9144000"/>
@@ -198,7 +199,7 @@
           <a:p>
             <a:fld id="{AD9DFCFE-27DA-48B2-9B07-B4C20CD6C499}" type="datetimeFigureOut">
               <a:rPr lang="zh-CN" altLang="en-US" smtClean="0"/>
-              <a:t>2026/3/16</a:t>
+              <a:t>2026/3/18</a:t>
             </a:fld>
             <a:endParaRPr lang="zh-CN" altLang="en-US"/>
           </a:p>
@@ -813,7 +814,7 @@
           <a:p>
             <a:fld id="{ED2EBBB6-B2F7-45FE-8FEE-172CAE584435}" type="datetimeFigureOut">
               <a:rPr lang="zh-CN" altLang="en-US" smtClean="0"/>
-              <a:t>2026/3/16</a:t>
+              <a:t>2026/3/18</a:t>
             </a:fld>
             <a:endParaRPr lang="zh-CN" altLang="en-US"/>
           </a:p>
@@ -983,7 +984,7 @@
           <a:p>
             <a:fld id="{ED2EBBB6-B2F7-45FE-8FEE-172CAE584435}" type="datetimeFigureOut">
               <a:rPr lang="zh-CN" altLang="en-US" smtClean="0"/>
-              <a:t>2026/3/16</a:t>
+              <a:t>2026/3/18</a:t>
             </a:fld>
             <a:endParaRPr lang="zh-CN" altLang="en-US"/>
           </a:p>
@@ -1163,7 +1164,7 @@
           <a:p>
             <a:fld id="{ED2EBBB6-B2F7-45FE-8FEE-172CAE584435}" type="datetimeFigureOut">
               <a:rPr lang="zh-CN" altLang="en-US" smtClean="0"/>
-              <a:t>2026/3/16</a:t>
+              <a:t>2026/3/18</a:t>
             </a:fld>
             <a:endParaRPr lang="zh-CN" altLang="en-US"/>
           </a:p>
@@ -1333,7 +1334,7 @@
           <a:p>
             <a:fld id="{ED2EBBB6-B2F7-45FE-8FEE-172CAE584435}" type="datetimeFigureOut">
               <a:rPr lang="zh-CN" altLang="en-US" smtClean="0"/>
-              <a:t>2026/3/16</a:t>
+              <a:t>2026/3/18</a:t>
             </a:fld>
             <a:endParaRPr lang="zh-CN" altLang="en-US"/>
           </a:p>
@@ -1579,7 +1580,7 @@
           <a:p>
             <a:fld id="{ED2EBBB6-B2F7-45FE-8FEE-172CAE584435}" type="datetimeFigureOut">
               <a:rPr lang="zh-CN" altLang="en-US" smtClean="0"/>
-              <a:t>2026/3/16</a:t>
+              <a:t>2026/3/18</a:t>
             </a:fld>
             <a:endParaRPr lang="zh-CN" altLang="en-US"/>
           </a:p>
@@ -1811,7 +1812,7 @@
           <a:p>
             <a:fld id="{ED2EBBB6-B2F7-45FE-8FEE-172CAE584435}" type="datetimeFigureOut">
               <a:rPr lang="zh-CN" altLang="en-US" smtClean="0"/>
-              <a:t>2026/3/16</a:t>
+              <a:t>2026/3/18</a:t>
             </a:fld>
             <a:endParaRPr lang="zh-CN" altLang="en-US"/>
           </a:p>
@@ -2178,7 +2179,7 @@
           <a:p>
             <a:fld id="{ED2EBBB6-B2F7-45FE-8FEE-172CAE584435}" type="datetimeFigureOut">
               <a:rPr lang="zh-CN" altLang="en-US" smtClean="0"/>
-              <a:t>2026/3/16</a:t>
+              <a:t>2026/3/18</a:t>
             </a:fld>
             <a:endParaRPr lang="zh-CN" altLang="en-US"/>
           </a:p>
@@ -2296,7 +2297,7 @@
           <a:p>
             <a:fld id="{ED2EBBB6-B2F7-45FE-8FEE-172CAE584435}" type="datetimeFigureOut">
               <a:rPr lang="zh-CN" altLang="en-US" smtClean="0"/>
-              <a:t>2026/3/16</a:t>
+              <a:t>2026/3/18</a:t>
             </a:fld>
             <a:endParaRPr lang="zh-CN" altLang="en-US"/>
           </a:p>
@@ -2391,7 +2392,7 @@
           <a:p>
             <a:fld id="{ED2EBBB6-B2F7-45FE-8FEE-172CAE584435}" type="datetimeFigureOut">
               <a:rPr lang="zh-CN" altLang="en-US" smtClean="0"/>
-              <a:t>2026/3/16</a:t>
+              <a:t>2026/3/18</a:t>
             </a:fld>
             <a:endParaRPr lang="zh-CN" altLang="en-US"/>
           </a:p>
@@ -2668,7 +2669,7 @@
           <a:p>
             <a:fld id="{ED2EBBB6-B2F7-45FE-8FEE-172CAE584435}" type="datetimeFigureOut">
               <a:rPr lang="zh-CN" altLang="en-US" smtClean="0"/>
-              <a:t>2026/3/16</a:t>
+              <a:t>2026/3/18</a:t>
             </a:fld>
             <a:endParaRPr lang="zh-CN" altLang="en-US"/>
           </a:p>
@@ -2925,7 +2926,7 @@
           <a:p>
             <a:fld id="{ED2EBBB6-B2F7-45FE-8FEE-172CAE584435}" type="datetimeFigureOut">
               <a:rPr lang="zh-CN" altLang="en-US" smtClean="0"/>
-              <a:t>2026/3/16</a:t>
+              <a:t>2026/3/18</a:t>
             </a:fld>
             <a:endParaRPr lang="zh-CN" altLang="en-US"/>
           </a:p>
@@ -3138,7 +3139,7 @@
           <a:p>
             <a:fld id="{ED2EBBB6-B2F7-45FE-8FEE-172CAE584435}" type="datetimeFigureOut">
               <a:rPr lang="zh-CN" altLang="en-US" smtClean="0"/>
-              <a:t>2026/3/16</a:t>
+              <a:t>2026/3/18</a:t>
             </a:fld>
             <a:endParaRPr lang="zh-CN" altLang="en-US"/>
           </a:p>
@@ -4035,6 +4036,112 @@
     <p:extLst>
       <p:ext uri="{BB962C8B-B14F-4D97-AF65-F5344CB8AC3E}">
         <p14:creationId xmlns:p14="http://schemas.microsoft.com/office/powerpoint/2010/main" val="1486230481"/>
+      </p:ext>
+    </p:extLst>
+  </p:cSld>
+  <p:clrMapOvr>
+    <a:masterClrMapping/>
+  </p:clrMapOvr>
+</p:sld>
+</file>
+
+<file path=ppt/slides/slide3.xml><?xml version="1.0" encoding="utf-8"?>
+<p:sld xmlns:a="http://schemas.openxmlformats.org/drawingml/2006/main" xmlns:r="http://schemas.openxmlformats.org/officeDocument/2006/relationships" xmlns:p="http://schemas.openxmlformats.org/presentationml/2006/main">
+  <p:cSld>
+    <p:spTree>
+      <p:nvGrpSpPr>
+        <p:cNvPr id="1" name=""/>
+        <p:cNvGrpSpPr/>
+        <p:nvPr/>
+      </p:nvGrpSpPr>
+      <p:grpSpPr>
+        <a:xfrm>
+          <a:off x="0" y="0"/>
+          <a:ext cx="0" cy="0"/>
+          <a:chOff x="0" y="0"/>
+          <a:chExt cx="0" cy="0"/>
+        </a:xfrm>
+      </p:grpSpPr>
+      <p:sp>
+        <p:nvSpPr>
+          <p:cNvPr id="6" name="矩形 5"/>
+          <p:cNvSpPr/>
+          <p:nvPr/>
+        </p:nvSpPr>
+        <p:spPr>
+          <a:xfrm>
+            <a:off x="0" y="0"/>
+            <a:ext cx="10814050" cy="6858000"/>
+          </a:xfrm>
+          <a:prstGeom prst="rect">
+            <a:avLst/>
+          </a:prstGeom>
+          <a:solidFill>
+            <a:srgbClr val="FBFCFE"/>
+          </a:solidFill>
+          <a:ln>
+            <a:noFill/>
+          </a:ln>
+        </p:spPr>
+        <p:style>
+          <a:lnRef idx="2">
+            <a:schemeClr val="accent1">
+              <a:shade val="50000"/>
+            </a:schemeClr>
+          </a:lnRef>
+          <a:fillRef idx="1">
+            <a:schemeClr val="accent1"/>
+          </a:fillRef>
+          <a:effectRef idx="0">
+            <a:schemeClr val="accent1"/>
+          </a:effectRef>
+          <a:fontRef idx="minor">
+            <a:schemeClr val="lt1"/>
+          </a:fontRef>
+        </p:style>
+        <p:txBody>
+          <a:bodyPr rtlCol="0" anchor="ctr"/>
+          <a:lstStyle/>
+          <a:p>
+            <a:pPr algn="ctr"/>
+            <a:endParaRPr lang="zh-CN" altLang="en-US"/>
+          </a:p>
+        </p:txBody>
+      </p:sp>
+      <p:pic>
+        <p:nvPicPr>
+          <p:cNvPr id="4" name="圖片 3"/>
+          <p:cNvPicPr>
+            <a:picLocks noChangeAspect="1"/>
+          </p:cNvPicPr>
+          <p:nvPr/>
+        </p:nvPicPr>
+        <p:blipFill>
+          <a:blip r:embed="rId2">
+            <a:extLst>
+              <a:ext uri="{28A0092B-C50C-407E-A947-70E740481C1C}">
+                <a14:useLocalDpi xmlns:a14="http://schemas.microsoft.com/office/drawing/2010/main" val="0"/>
+              </a:ext>
+            </a:extLst>
+          </a:blip>
+          <a:stretch>
+            <a:fillRect/>
+          </a:stretch>
+        </p:blipFill>
+        <p:spPr>
+          <a:xfrm>
+            <a:off x="1978025" y="0"/>
+            <a:ext cx="6858000" cy="6858000"/>
+          </a:xfrm>
+          <a:prstGeom prst="rect">
+            <a:avLst/>
+          </a:prstGeom>
+        </p:spPr>
+      </p:pic>
+    </p:spTree>
+    <p:extLst>
+      <p:ext uri="{BB962C8B-B14F-4D97-AF65-F5344CB8AC3E}">
+        <p14:creationId xmlns:p14="http://schemas.microsoft.com/office/powerpoint/2010/main" val="1047178736"/>
       </p:ext>
     </p:extLst>
   </p:cSld>
